--- a/13. SPQA/SPQA 평가 결과 및 대안.pptx
+++ b/13. SPQA/SPQA 평가 결과 및 대안.pptx
@@ -212,7 +212,7 @@
             <a:fld id="{FA34098A-4737-423D-94AD-5CFBD91B4550}" type="datetimeFigureOut">
               <a:rPr lang="ko-KR" altLang="en-US" smtClean="0"/>
               <a:pPr/>
-              <a:t>2025-09-23</a:t>
+              <a:t>2025-09-25</a:t>
             </a:fld>
             <a:endParaRPr lang="ko-KR" altLang="en-US"/>
           </a:p>
@@ -921,7 +921,7 @@
             <a:fld id="{4E3E3FF9-2D19-4BE8-9A64-3FBAD4C12BA1}" type="datetimeFigureOut">
               <a:rPr lang="ko-KR" altLang="en-US" smtClean="0"/>
               <a:pPr/>
-              <a:t>2025-09-23</a:t>
+              <a:t>2025-09-25</a:t>
             </a:fld>
             <a:endParaRPr lang="ko-KR" altLang="en-US"/>
           </a:p>
@@ -1088,7 +1088,7 @@
             <a:fld id="{4E3E3FF9-2D19-4BE8-9A64-3FBAD4C12BA1}" type="datetimeFigureOut">
               <a:rPr lang="ko-KR" altLang="en-US" smtClean="0"/>
               <a:pPr/>
-              <a:t>2025-09-23</a:t>
+              <a:t>2025-09-25</a:t>
             </a:fld>
             <a:endParaRPr lang="ko-KR" altLang="en-US"/>
           </a:p>
@@ -1265,7 +1265,7 @@
             <a:fld id="{4E3E3FF9-2D19-4BE8-9A64-3FBAD4C12BA1}" type="datetimeFigureOut">
               <a:rPr lang="ko-KR" altLang="en-US" smtClean="0"/>
               <a:pPr/>
-              <a:t>2025-09-23</a:t>
+              <a:t>2025-09-25</a:t>
             </a:fld>
             <a:endParaRPr lang="ko-KR" altLang="en-US"/>
           </a:p>
@@ -3451,7 +3451,7 @@
             <a:fld id="{4E3E3FF9-2D19-4BE8-9A64-3FBAD4C12BA1}" type="datetimeFigureOut">
               <a:rPr lang="ko-KR" altLang="en-US" smtClean="0"/>
               <a:pPr/>
-              <a:t>2025-09-23</a:t>
+              <a:t>2025-09-25</a:t>
             </a:fld>
             <a:endParaRPr lang="ko-KR" altLang="en-US"/>
           </a:p>
@@ -3694,7 +3694,7 @@
             <a:fld id="{4E3E3FF9-2D19-4BE8-9A64-3FBAD4C12BA1}" type="datetimeFigureOut">
               <a:rPr lang="ko-KR" altLang="en-US" smtClean="0"/>
               <a:pPr/>
-              <a:t>2025-09-23</a:t>
+              <a:t>2025-09-25</a:t>
             </a:fld>
             <a:endParaRPr lang="ko-KR" altLang="en-US"/>
           </a:p>
@@ -3979,7 +3979,7 @@
             <a:fld id="{4E3E3FF9-2D19-4BE8-9A64-3FBAD4C12BA1}" type="datetimeFigureOut">
               <a:rPr lang="ko-KR" altLang="en-US" smtClean="0"/>
               <a:pPr/>
-              <a:t>2025-09-23</a:t>
+              <a:t>2025-09-25</a:t>
             </a:fld>
             <a:endParaRPr lang="ko-KR" altLang="en-US"/>
           </a:p>
@@ -4398,7 +4398,7 @@
             <a:fld id="{4E3E3FF9-2D19-4BE8-9A64-3FBAD4C12BA1}" type="datetimeFigureOut">
               <a:rPr lang="ko-KR" altLang="en-US" smtClean="0"/>
               <a:pPr/>
-              <a:t>2025-09-23</a:t>
+              <a:t>2025-09-25</a:t>
             </a:fld>
             <a:endParaRPr lang="ko-KR" altLang="en-US"/>
           </a:p>
@@ -4513,7 +4513,7 @@
             <a:fld id="{4E3E3FF9-2D19-4BE8-9A64-3FBAD4C12BA1}" type="datetimeFigureOut">
               <a:rPr lang="ko-KR" altLang="en-US" smtClean="0"/>
               <a:pPr/>
-              <a:t>2025-09-23</a:t>
+              <a:t>2025-09-25</a:t>
             </a:fld>
             <a:endParaRPr lang="ko-KR" altLang="en-US"/>
           </a:p>
@@ -4605,7 +4605,7 @@
             <a:fld id="{4E3E3FF9-2D19-4BE8-9A64-3FBAD4C12BA1}" type="datetimeFigureOut">
               <a:rPr lang="ko-KR" altLang="en-US" smtClean="0"/>
               <a:pPr/>
-              <a:t>2025-09-23</a:t>
+              <a:t>2025-09-25</a:t>
             </a:fld>
             <a:endParaRPr lang="ko-KR" altLang="en-US"/>
           </a:p>
@@ -4879,7 +4879,7 @@
             <a:fld id="{4E3E3FF9-2D19-4BE8-9A64-3FBAD4C12BA1}" type="datetimeFigureOut">
               <a:rPr lang="ko-KR" altLang="en-US" smtClean="0"/>
               <a:pPr/>
-              <a:t>2025-09-23</a:t>
+              <a:t>2025-09-25</a:t>
             </a:fld>
             <a:endParaRPr lang="ko-KR" altLang="en-US"/>
           </a:p>
@@ -5129,7 +5129,7 @@
             <a:fld id="{4E3E3FF9-2D19-4BE8-9A64-3FBAD4C12BA1}" type="datetimeFigureOut">
               <a:rPr lang="ko-KR" altLang="en-US" smtClean="0"/>
               <a:pPr/>
-              <a:t>2025-09-23</a:t>
+              <a:t>2025-09-25</a:t>
             </a:fld>
             <a:endParaRPr lang="ko-KR" altLang="en-US"/>
           </a:p>
@@ -5339,7 +5339,7 @@
             <a:fld id="{4E3E3FF9-2D19-4BE8-9A64-3FBAD4C12BA1}" type="datetimeFigureOut">
               <a:rPr lang="ko-KR" altLang="en-US" smtClean="0"/>
               <a:pPr/>
-              <a:t>2025-09-23</a:t>
+              <a:t>2025-09-25</a:t>
             </a:fld>
             <a:endParaRPr lang="ko-KR" altLang="en-US"/>
           </a:p>
@@ -6008,11 +6008,7 @@
           <a:p>
             <a:r>
               <a:rPr lang="ko-KR" altLang="en-US" sz="1400" smtClean="0"/>
-              <a:t>■ </a:t>
-            </a:r>
-            <a:r>
-              <a:rPr lang="ko-KR" altLang="en-US" sz="1400" smtClean="0"/>
-              <a:t>금년도 </a:t>
+              <a:t>■ 금년도 </a:t>
             </a:r>
             <a:r>
               <a:rPr lang="en-US" altLang="ko-KR" sz="1400" smtClean="0"/>
@@ -7458,11 +7454,7 @@
             </a:r>
             <a:r>
               <a:rPr lang="ko-KR" altLang="en-US" sz="1400"/>
-              <a:t>에 따른 </a:t>
-            </a:r>
-            <a:r>
-              <a:rPr lang="ko-KR" altLang="en-US" sz="1400"/>
-              <a:t>입찰 </a:t>
+              <a:t>에 따른 입찰 </a:t>
             </a:r>
             <a:r>
               <a:rPr lang="ko-KR" altLang="en-US" sz="1400" smtClean="0"/>
@@ -8787,11 +8779,7 @@
           <a:p>
             <a:r>
               <a:rPr lang="ko-KR" altLang="en-US" sz="1400" smtClean="0"/>
-              <a:t>■ </a:t>
-            </a:r>
-            <a:r>
-              <a:rPr lang="ko-KR" altLang="en-US" sz="1400" smtClean="0"/>
-              <a:t>현상황</a:t>
+              <a:t>■ 현상황</a:t>
             </a:r>
             <a:endParaRPr lang="ko-KR" altLang="en-US" sz="1400"/>
           </a:p>
@@ -8866,11 +8854,7 @@
           <a:p>
             <a:r>
               <a:rPr lang="ko-KR" altLang="en-US" sz="1400" smtClean="0"/>
-              <a:t>■ </a:t>
-            </a:r>
-            <a:r>
-              <a:rPr lang="ko-KR" altLang="en-US" sz="1400" smtClean="0"/>
-              <a:t>상세 대안 및 리스크</a:t>
+              <a:t>■ 상세 대안 및 리스크</a:t>
             </a:r>
             <a:endParaRPr lang="ko-KR" altLang="en-US" sz="1400"/>
           </a:p>
@@ -9779,15 +9763,7 @@
                             <a:schemeClr val="tx1"/>
                           </a:solidFill>
                         </a:rPr>
-                        <a:t>, </a:t>
-                      </a:r>
-                      <a:r>
-                        <a:rPr lang="en-US" altLang="ko-KR" sz="1000" baseline="0" smtClean="0">
-                          <a:solidFill>
-                            <a:schemeClr val="tx1"/>
-                          </a:solidFill>
-                        </a:rPr>
-                        <a:t>ALM </a:t>
+                        <a:t>, ALM </a:t>
                       </a:r>
                       <a:r>
                         <a:rPr lang="ko-KR" altLang="en-US" sz="1000" baseline="0" smtClean="0">
@@ -10078,15 +10054,7 @@
                   <a:srgbClr val="0070C0"/>
                 </a:solidFill>
               </a:rPr>
-              <a:t>Proto </a:t>
-            </a:r>
-            <a:r>
-              <a:rPr lang="en-US" altLang="ko-KR" sz="1200" b="1">
-                <a:solidFill>
-                  <a:srgbClr val="0070C0"/>
-                </a:solidFill>
-              </a:rPr>
-              <a:t>26/8</a:t>
+              <a:t>Proto 26/8</a:t>
             </a:r>
             <a:r>
               <a:rPr lang="en-US" altLang="ko-KR" sz="1200" b="1" smtClean="0">
@@ -10227,10 +10195,2059 @@
               <a:rPr lang="ko-KR" altLang="en-US" b="1" smtClean="0">
                 <a:latin typeface="+mn-ea"/>
               </a:rPr>
-              <a:t>별첨</a:t>
+              <a:t>별첨 </a:t>
+            </a:r>
+            <a:r>
+              <a:rPr lang="en-US" altLang="ko-KR" b="1" smtClean="0">
+                <a:latin typeface="+mn-ea"/>
+              </a:rPr>
+              <a:t>– QV SPQA </a:t>
+            </a:r>
+            <a:r>
+              <a:rPr lang="ko-KR" altLang="en-US" b="1" smtClean="0"/>
+              <a:t>타임라인</a:t>
             </a:r>
             <a:endParaRPr lang="en-US" altLang="ko-KR" b="1" dirty="0">
               <a:latin typeface="+mn-ea"/>
+            </a:endParaRPr>
+          </a:p>
+        </p:txBody>
+      </p:sp>
+      <p:sp>
+        <p:nvSpPr>
+          <p:cNvPr id="2" name="직사각형 1"/>
+          <p:cNvSpPr/>
+          <p:nvPr/>
+        </p:nvSpPr>
+        <p:spPr>
+          <a:xfrm>
+            <a:off x="467544" y="836712"/>
+            <a:ext cx="8208912" cy="5016758"/>
+          </a:xfrm>
+          <a:prstGeom prst="rect">
+            <a:avLst/>
+          </a:prstGeom>
+        </p:spPr>
+        <p:txBody>
+          <a:bodyPr wrap="square">
+            <a:spAutoFit/>
+          </a:bodyPr>
+          <a:lstStyle/>
+          <a:p>
+            <a:pPr latinLnBrk="0"/>
+            <a:r>
+              <a:rPr lang="en-US" altLang="ko-KR" sz="1000">
+                <a:solidFill>
+                  <a:srgbClr val="000000"/>
+                </a:solidFill>
+                <a:latin typeface="맑은 고딕" panose="020B0503020000020004" pitchFamily="50" charset="-127"/>
+              </a:rPr>
+              <a:t>24</a:t>
+            </a:r>
+            <a:r>
+              <a:rPr lang="ko-KR" altLang="en-US" sz="1000">
+                <a:solidFill>
+                  <a:srgbClr val="000000"/>
+                </a:solidFill>
+                <a:latin typeface="맑은 고딕" panose="020B0503020000020004" pitchFamily="50" charset="-127"/>
+              </a:rPr>
+              <a:t>년 </a:t>
+            </a:r>
+            <a:r>
+              <a:rPr lang="en-US" altLang="ko-KR" sz="1000">
+                <a:solidFill>
+                  <a:srgbClr val="000000"/>
+                </a:solidFill>
+                <a:latin typeface="맑은 고딕" panose="020B0503020000020004" pitchFamily="50" charset="-127"/>
+              </a:rPr>
+              <a:t>12</a:t>
+            </a:r>
+            <a:r>
+              <a:rPr lang="ko-KR" altLang="en-US" sz="1000">
+                <a:solidFill>
+                  <a:srgbClr val="000000"/>
+                </a:solidFill>
+                <a:latin typeface="맑은 고딕" panose="020B0503020000020004" pitchFamily="50" charset="-127"/>
+              </a:rPr>
+              <a:t>월 </a:t>
+            </a:r>
+            <a:r>
+              <a:rPr lang="en-US" altLang="ko-KR" sz="1000">
+                <a:solidFill>
+                  <a:srgbClr val="000000"/>
+                </a:solidFill>
+                <a:latin typeface="맑은 고딕" panose="020B0503020000020004" pitchFamily="50" charset="-127"/>
+              </a:rPr>
+              <a:t>23</a:t>
+            </a:r>
+            <a:r>
+              <a:rPr lang="ko-KR" altLang="en-US" sz="1000">
+                <a:solidFill>
+                  <a:srgbClr val="000000"/>
+                </a:solidFill>
+                <a:latin typeface="맑은 고딕" panose="020B0503020000020004" pitchFamily="50" charset="-127"/>
+              </a:rPr>
+              <a:t>일부터 </a:t>
+            </a:r>
+            <a:r>
+              <a:rPr lang="en-US" altLang="ko-KR" sz="1000">
+                <a:solidFill>
+                  <a:srgbClr val="000000"/>
+                </a:solidFill>
+                <a:latin typeface="맑은 고딕" panose="020B0503020000020004" pitchFamily="50" charset="-127"/>
+              </a:rPr>
+              <a:t>25</a:t>
+            </a:r>
+            <a:r>
+              <a:rPr lang="ko-KR" altLang="en-US" sz="1000">
+                <a:solidFill>
+                  <a:srgbClr val="000000"/>
+                </a:solidFill>
+                <a:latin typeface="맑은 고딕" panose="020B0503020000020004" pitchFamily="50" charset="-127"/>
+              </a:rPr>
+              <a:t>년도의 </a:t>
+            </a:r>
+            <a:r>
+              <a:rPr lang="en-US" altLang="ko-KR" sz="1000">
+                <a:solidFill>
+                  <a:srgbClr val="000000"/>
+                </a:solidFill>
+                <a:latin typeface="맑은 고딕" panose="020B0503020000020004" pitchFamily="50" charset="-127"/>
+              </a:rPr>
+              <a:t>SPQA </a:t>
+            </a:r>
+            <a:r>
+              <a:rPr lang="ko-KR" altLang="en-US" sz="1000">
+                <a:solidFill>
+                  <a:srgbClr val="000000"/>
+                </a:solidFill>
+                <a:latin typeface="맑은 고딕" panose="020B0503020000020004" pitchFamily="50" charset="-127"/>
+              </a:rPr>
+              <a:t>평가를 통한 입찰자격 제한 </a:t>
+            </a:r>
+            <a:r>
+              <a:rPr lang="ko-KR" altLang="en-US" sz="1000">
+                <a:solidFill>
+                  <a:srgbClr val="000000"/>
+                </a:solidFill>
+                <a:latin typeface="맑은 고딕" panose="020B0503020000020004" pitchFamily="50" charset="-127"/>
+              </a:rPr>
+              <a:t>내용 </a:t>
+            </a:r>
+            <a:r>
+              <a:rPr lang="ko-KR" altLang="en-US" sz="1000" smtClean="0">
+                <a:solidFill>
+                  <a:srgbClr val="000000"/>
+                </a:solidFill>
+                <a:latin typeface="맑은 고딕" panose="020B0503020000020004" pitchFamily="50" charset="-127"/>
+              </a:rPr>
+              <a:t>인지 </a:t>
+            </a:r>
+            <a:r>
+              <a:rPr lang="en-US" altLang="ko-KR" sz="1000" smtClean="0">
+                <a:solidFill>
+                  <a:srgbClr val="000000"/>
+                </a:solidFill>
+                <a:latin typeface="맑은 고딕" panose="020B0503020000020004" pitchFamily="50" charset="-127"/>
+              </a:rPr>
+              <a:t>: </a:t>
+            </a:r>
+            <a:r>
+              <a:rPr lang="ko-KR" altLang="en-US" sz="1000" smtClean="0">
+                <a:solidFill>
+                  <a:srgbClr val="000000"/>
+                </a:solidFill>
+                <a:latin typeface="맑은 고딕" panose="020B0503020000020004" pitchFamily="50" charset="-127"/>
+              </a:rPr>
+              <a:t>허정택</a:t>
+            </a:r>
+            <a:r>
+              <a:rPr lang="en-US" altLang="ko-KR" sz="1000">
+                <a:solidFill>
+                  <a:srgbClr val="000000"/>
+                </a:solidFill>
+                <a:latin typeface="맑은 고딕" panose="020B0503020000020004" pitchFamily="50" charset="-127"/>
+              </a:rPr>
+              <a:t>/</a:t>
+            </a:r>
+            <a:r>
+              <a:rPr lang="ko-KR" altLang="en-US" sz="1000" smtClean="0">
+                <a:solidFill>
+                  <a:srgbClr val="000000"/>
+                </a:solidFill>
+                <a:latin typeface="맑은 고딕" panose="020B0503020000020004" pitchFamily="50" charset="-127"/>
+              </a:rPr>
+              <a:t>상무</a:t>
+            </a:r>
+            <a:endParaRPr lang="en-US" altLang="ko-KR" sz="1000" smtClean="0">
+              <a:solidFill>
+                <a:srgbClr val="000000"/>
+              </a:solidFill>
+              <a:latin typeface="맑은 고딕" panose="020B0503020000020004" pitchFamily="50" charset="-127"/>
+            </a:endParaRPr>
+          </a:p>
+          <a:p>
+            <a:pPr latinLnBrk="0"/>
+            <a:r>
+              <a:rPr lang="en-US" altLang="ko-KR" sz="1000">
+                <a:solidFill>
+                  <a:srgbClr val="000000"/>
+                </a:solidFill>
+                <a:latin typeface="맑은 고딕" panose="020B0503020000020004" pitchFamily="50" charset="-127"/>
+              </a:rPr>
+              <a:t> </a:t>
+            </a:r>
+            <a:r>
+              <a:rPr lang="en-US" altLang="ko-KR" sz="1000" smtClean="0">
+                <a:solidFill>
+                  <a:srgbClr val="000000"/>
+                </a:solidFill>
+                <a:latin typeface="맑은 고딕" panose="020B0503020000020004" pitchFamily="50" charset="-127"/>
+              </a:rPr>
+              <a:t>      - </a:t>
+            </a:r>
+            <a:r>
+              <a:rPr lang="ko-KR" altLang="en-US" sz="1000" smtClean="0">
+                <a:solidFill>
+                  <a:srgbClr val="000000"/>
+                </a:solidFill>
+                <a:latin typeface="맑은 고딕" panose="020B0503020000020004" pitchFamily="50" charset="-127"/>
+              </a:rPr>
+              <a:t>해당 메일내용으로 </a:t>
+            </a:r>
+            <a:r>
+              <a:rPr lang="en-US" altLang="ko-KR" sz="1000" smtClean="0">
+                <a:solidFill>
+                  <a:srgbClr val="000000"/>
+                </a:solidFill>
+                <a:latin typeface="맑은 고딕" panose="020B0503020000020004" pitchFamily="50" charset="-127"/>
+              </a:rPr>
+              <a:t>PTC </a:t>
+            </a:r>
+            <a:r>
+              <a:rPr lang="ko-KR" altLang="en-US" sz="1000" smtClean="0">
+                <a:solidFill>
+                  <a:srgbClr val="000000"/>
+                </a:solidFill>
+                <a:latin typeface="맑은 고딕" panose="020B0503020000020004" pitchFamily="50" charset="-127"/>
+              </a:rPr>
+              <a:t>는 제어기 입찰 자격 대상이 아님을 인지 </a:t>
+            </a:r>
+            <a:r>
+              <a:rPr lang="en-US" altLang="ko-KR" sz="1000" smtClean="0">
+                <a:solidFill>
+                  <a:srgbClr val="000000"/>
+                </a:solidFill>
+                <a:latin typeface="맑은 고딕" panose="020B0503020000020004" pitchFamily="50" charset="-127"/>
+              </a:rPr>
+              <a:t>(</a:t>
+            </a:r>
+            <a:r>
+              <a:rPr lang="ko-KR" altLang="en-US" sz="1000" smtClean="0">
+                <a:solidFill>
+                  <a:srgbClr val="000000"/>
+                </a:solidFill>
+                <a:latin typeface="맑은 고딕" panose="020B0503020000020004" pitchFamily="50" charset="-127"/>
+              </a:rPr>
+              <a:t>오세영 수석</a:t>
+            </a:r>
+            <a:r>
+              <a:rPr lang="en-US" altLang="ko-KR" sz="1000" smtClean="0">
+                <a:solidFill>
+                  <a:srgbClr val="000000"/>
+                </a:solidFill>
+                <a:latin typeface="맑은 고딕" panose="020B0503020000020004" pitchFamily="50" charset="-127"/>
+              </a:rPr>
+              <a:t>)</a:t>
+            </a:r>
+          </a:p>
+          <a:p>
+            <a:pPr latinLnBrk="0"/>
+            <a:endParaRPr lang="en-US" altLang="ko-KR" sz="1000">
+              <a:solidFill>
+                <a:srgbClr val="000000"/>
+              </a:solidFill>
+              <a:latin typeface="맑은 고딕" panose="020B0503020000020004" pitchFamily="50" charset="-127"/>
+            </a:endParaRPr>
+          </a:p>
+          <a:p>
+            <a:pPr latinLnBrk="0"/>
+            <a:r>
+              <a:rPr lang="en-US" altLang="ko-KR" sz="1000" smtClean="0">
+                <a:solidFill>
+                  <a:srgbClr val="000000"/>
+                </a:solidFill>
+                <a:latin typeface="맑은 고딕" panose="020B0503020000020004" pitchFamily="50" charset="-127"/>
+              </a:rPr>
+              <a:t>25</a:t>
+            </a:r>
+            <a:r>
+              <a:rPr lang="ko-KR" altLang="en-US" sz="1000">
+                <a:solidFill>
+                  <a:srgbClr val="000000"/>
+                </a:solidFill>
+                <a:latin typeface="맑은 고딕" panose="020B0503020000020004" pitchFamily="50" charset="-127"/>
+              </a:rPr>
+              <a:t>년 </a:t>
+            </a:r>
+            <a:r>
+              <a:rPr lang="en-US" altLang="ko-KR" sz="1000">
+                <a:solidFill>
+                  <a:srgbClr val="000000"/>
+                </a:solidFill>
+                <a:latin typeface="맑은 고딕" panose="020B0503020000020004" pitchFamily="50" charset="-127"/>
+              </a:rPr>
+              <a:t>1</a:t>
+            </a:r>
+            <a:r>
+              <a:rPr lang="ko-KR" altLang="en-US" sz="1000">
+                <a:solidFill>
+                  <a:srgbClr val="000000"/>
+                </a:solidFill>
+                <a:latin typeface="맑은 고딕" panose="020B0503020000020004" pitchFamily="50" charset="-127"/>
+              </a:rPr>
+              <a:t>월 </a:t>
+            </a:r>
+            <a:r>
+              <a:rPr lang="en-US" altLang="ko-KR" sz="1000">
+                <a:solidFill>
+                  <a:srgbClr val="000000"/>
+                </a:solidFill>
+                <a:latin typeface="맑은 고딕" panose="020B0503020000020004" pitchFamily="50" charset="-127"/>
+              </a:rPr>
+              <a:t>20</a:t>
+            </a:r>
+            <a:r>
+              <a:rPr lang="ko-KR" altLang="en-US" sz="1000">
+                <a:solidFill>
+                  <a:srgbClr val="000000"/>
+                </a:solidFill>
+                <a:latin typeface="맑은 고딕" panose="020B0503020000020004" pitchFamily="50" charset="-127"/>
+              </a:rPr>
+              <a:t>일 정재형 수석 입사</a:t>
+            </a:r>
+            <a:r>
+              <a:rPr lang="en-US" altLang="ko-KR" sz="1000">
+                <a:solidFill>
+                  <a:srgbClr val="000000"/>
+                </a:solidFill>
+                <a:latin typeface="맑은 고딕" panose="020B0503020000020004" pitchFamily="50" charset="-127"/>
+              </a:rPr>
+              <a:t>, MBEAM </a:t>
+            </a:r>
+            <a:r>
+              <a:rPr lang="ko-KR" altLang="en-US" sz="1000">
+                <a:solidFill>
+                  <a:srgbClr val="000000"/>
+                </a:solidFill>
+                <a:latin typeface="맑은 고딕" panose="020B0503020000020004" pitchFamily="50" charset="-127"/>
+              </a:rPr>
+              <a:t>프로젝트 </a:t>
+            </a:r>
+            <a:r>
+              <a:rPr lang="ko-KR" altLang="en-US" sz="1000">
+                <a:solidFill>
+                  <a:srgbClr val="000000"/>
+                </a:solidFill>
+                <a:latin typeface="맑은 고딕" panose="020B0503020000020004" pitchFamily="50" charset="-127"/>
+              </a:rPr>
+              <a:t>바로 </a:t>
+            </a:r>
+            <a:r>
+              <a:rPr lang="ko-KR" altLang="en-US" sz="1000" smtClean="0">
+                <a:solidFill>
+                  <a:srgbClr val="000000"/>
+                </a:solidFill>
+                <a:latin typeface="맑은 고딕" panose="020B0503020000020004" pitchFamily="50" charset="-127"/>
+              </a:rPr>
+              <a:t>참여</a:t>
+            </a:r>
+            <a:endParaRPr lang="en-US" altLang="ko-KR" sz="1000" smtClean="0">
+              <a:solidFill>
+                <a:srgbClr val="000000"/>
+              </a:solidFill>
+              <a:latin typeface="맑은 고딕" panose="020B0503020000020004" pitchFamily="50" charset="-127"/>
+            </a:endParaRPr>
+          </a:p>
+          <a:p>
+            <a:pPr latinLnBrk="0"/>
+            <a:endParaRPr lang="ko-KR" altLang="en-US" sz="1000">
+              <a:solidFill>
+                <a:srgbClr val="000000"/>
+              </a:solidFill>
+              <a:latin typeface="맑은 고딕" panose="020B0503020000020004" pitchFamily="50" charset="-127"/>
+            </a:endParaRPr>
+          </a:p>
+          <a:p>
+            <a:pPr latinLnBrk="0"/>
+            <a:r>
+              <a:rPr lang="en-US" altLang="ko-KR" sz="1000">
+                <a:solidFill>
+                  <a:srgbClr val="000000"/>
+                </a:solidFill>
+                <a:latin typeface="맑은 고딕" panose="020B0503020000020004" pitchFamily="50" charset="-127"/>
+              </a:rPr>
+              <a:t>25</a:t>
+            </a:r>
+            <a:r>
+              <a:rPr lang="ko-KR" altLang="en-US" sz="1000">
+                <a:solidFill>
+                  <a:srgbClr val="000000"/>
+                </a:solidFill>
+                <a:latin typeface="맑은 고딕" panose="020B0503020000020004" pitchFamily="50" charset="-127"/>
+              </a:rPr>
+              <a:t>년 </a:t>
+            </a:r>
+            <a:r>
+              <a:rPr lang="en-US" altLang="ko-KR" sz="1000">
+                <a:solidFill>
+                  <a:srgbClr val="000000"/>
+                </a:solidFill>
+                <a:latin typeface="맑은 고딕" panose="020B0503020000020004" pitchFamily="50" charset="-127"/>
+              </a:rPr>
+              <a:t>2</a:t>
+            </a:r>
+            <a:r>
+              <a:rPr lang="ko-KR" altLang="en-US" sz="1000">
+                <a:solidFill>
+                  <a:srgbClr val="000000"/>
+                </a:solidFill>
+                <a:latin typeface="맑은 고딕" panose="020B0503020000020004" pitchFamily="50" charset="-127"/>
+              </a:rPr>
+              <a:t>월 </a:t>
+            </a:r>
+            <a:r>
+              <a:rPr lang="en-US" altLang="ko-KR" sz="1000">
+                <a:solidFill>
+                  <a:srgbClr val="000000"/>
+                </a:solidFill>
+                <a:latin typeface="맑은 고딕" panose="020B0503020000020004" pitchFamily="50" charset="-127"/>
+              </a:rPr>
+              <a:t>7</a:t>
+            </a:r>
+            <a:r>
+              <a:rPr lang="ko-KR" altLang="en-US" sz="1000">
+                <a:solidFill>
+                  <a:srgbClr val="000000"/>
+                </a:solidFill>
+                <a:latin typeface="맑은 고딕" panose="020B0503020000020004" pitchFamily="50" charset="-127"/>
+              </a:rPr>
+              <a:t>일 </a:t>
+            </a:r>
+            <a:r>
+              <a:rPr lang="en-US" altLang="ko-KR" sz="1000">
+                <a:solidFill>
+                  <a:srgbClr val="000000"/>
+                </a:solidFill>
+                <a:latin typeface="맑은 고딕" panose="020B0503020000020004" pitchFamily="50" charset="-127"/>
+              </a:rPr>
+              <a:t>SPQA </a:t>
+            </a:r>
+            <a:r>
+              <a:rPr lang="ko-KR" altLang="en-US" sz="1000">
+                <a:solidFill>
+                  <a:srgbClr val="000000"/>
+                </a:solidFill>
+                <a:latin typeface="맑은 고딕" panose="020B0503020000020004" pitchFamily="50" charset="-127"/>
+              </a:rPr>
+              <a:t>평가 대응 필요성 인지 및 지시 </a:t>
+            </a:r>
+            <a:r>
+              <a:rPr lang="en-US" altLang="ko-KR" sz="1000">
+                <a:solidFill>
+                  <a:srgbClr val="000000"/>
+                </a:solidFill>
+                <a:latin typeface="맑은 고딕" panose="020B0503020000020004" pitchFamily="50" charset="-127"/>
+              </a:rPr>
+              <a:t>: </a:t>
+            </a:r>
+            <a:r>
+              <a:rPr lang="ko-KR" altLang="en-US" sz="1000">
+                <a:solidFill>
+                  <a:srgbClr val="000000"/>
+                </a:solidFill>
+                <a:latin typeface="맑은 고딕" panose="020B0503020000020004" pitchFamily="50" charset="-127"/>
+              </a:rPr>
+              <a:t>이천동</a:t>
+            </a:r>
+            <a:r>
+              <a:rPr lang="en-US" altLang="ko-KR" sz="1000">
+                <a:solidFill>
+                  <a:srgbClr val="000000"/>
+                </a:solidFill>
+                <a:latin typeface="맑은 고딕" panose="020B0503020000020004" pitchFamily="50" charset="-127"/>
+              </a:rPr>
+              <a:t>/</a:t>
+            </a:r>
+            <a:r>
+              <a:rPr lang="ko-KR" altLang="en-US" sz="1000" smtClean="0">
+                <a:solidFill>
+                  <a:srgbClr val="000000"/>
+                </a:solidFill>
+                <a:latin typeface="맑은 고딕" panose="020B0503020000020004" pitchFamily="50" charset="-127"/>
+              </a:rPr>
+              <a:t>전무</a:t>
+            </a:r>
+            <a:r>
+              <a:rPr lang="en-US" altLang="ko-KR" sz="1000">
+                <a:solidFill>
+                  <a:srgbClr val="000000"/>
+                </a:solidFill>
+                <a:latin typeface="맑은 고딕" panose="020B0503020000020004" pitchFamily="50" charset="-127"/>
+              </a:rPr>
+              <a:t> </a:t>
+            </a:r>
+            <a:r>
+              <a:rPr lang="en-US" altLang="ko-KR" sz="1000" smtClean="0">
+                <a:solidFill>
+                  <a:srgbClr val="000000"/>
+                </a:solidFill>
+                <a:latin typeface="맑은 고딕" panose="020B0503020000020004" pitchFamily="50" charset="-127"/>
+              </a:rPr>
+              <a:t>-&gt; </a:t>
+            </a:r>
+            <a:r>
+              <a:rPr lang="ko-KR" altLang="en-US" sz="1000" smtClean="0">
+                <a:solidFill>
+                  <a:srgbClr val="000000"/>
+                </a:solidFill>
+                <a:latin typeface="맑은 고딕" panose="020B0503020000020004" pitchFamily="50" charset="-127"/>
+              </a:rPr>
+              <a:t>정재형</a:t>
+            </a:r>
+            <a:r>
+              <a:rPr lang="en-US" altLang="ko-KR" sz="1000">
+                <a:solidFill>
+                  <a:srgbClr val="000000"/>
+                </a:solidFill>
+                <a:latin typeface="맑은 고딕" panose="020B0503020000020004" pitchFamily="50" charset="-127"/>
+              </a:rPr>
+              <a:t>/</a:t>
+            </a:r>
+            <a:r>
+              <a:rPr lang="ko-KR" altLang="en-US" sz="1000" smtClean="0">
+                <a:solidFill>
+                  <a:srgbClr val="000000"/>
+                </a:solidFill>
+                <a:latin typeface="맑은 고딕" panose="020B0503020000020004" pitchFamily="50" charset="-127"/>
+              </a:rPr>
+              <a:t>수석 </a:t>
+            </a:r>
+            <a:r>
+              <a:rPr lang="en-US" altLang="ko-KR" sz="1000" smtClean="0">
+                <a:solidFill>
+                  <a:srgbClr val="000000"/>
+                </a:solidFill>
+                <a:latin typeface="맑은 고딕" panose="020B0503020000020004" pitchFamily="50" charset="-127"/>
+              </a:rPr>
+              <a:t>(</a:t>
+            </a:r>
+            <a:r>
+              <a:rPr lang="ko-KR" altLang="en-US" sz="1000" smtClean="0">
+                <a:solidFill>
+                  <a:srgbClr val="000000"/>
+                </a:solidFill>
+                <a:latin typeface="맑은 고딕" panose="020B0503020000020004" pitchFamily="50" charset="-127"/>
+              </a:rPr>
+              <a:t>입찰자격 제한의 내용은 인지 못함</a:t>
+            </a:r>
+            <a:r>
+              <a:rPr lang="en-US" altLang="ko-KR" sz="1000" smtClean="0">
+                <a:solidFill>
+                  <a:srgbClr val="000000"/>
+                </a:solidFill>
+                <a:latin typeface="맑은 고딕" panose="020B0503020000020004" pitchFamily="50" charset="-127"/>
+              </a:rPr>
+              <a:t>)</a:t>
+            </a:r>
+          </a:p>
+          <a:p>
+            <a:pPr latinLnBrk="0"/>
+            <a:endParaRPr lang="ko-KR" altLang="en-US" sz="1000">
+              <a:solidFill>
+                <a:srgbClr val="000000"/>
+              </a:solidFill>
+              <a:latin typeface="맑은 고딕" panose="020B0503020000020004" pitchFamily="50" charset="-127"/>
+            </a:endParaRPr>
+          </a:p>
+          <a:p>
+            <a:pPr latinLnBrk="0"/>
+            <a:r>
+              <a:rPr lang="en-US" altLang="ko-KR" sz="1000">
+                <a:solidFill>
+                  <a:srgbClr val="000000"/>
+                </a:solidFill>
+                <a:latin typeface="맑은 고딕" panose="020B0503020000020004" pitchFamily="50" charset="-127"/>
+              </a:rPr>
+              <a:t>25</a:t>
+            </a:r>
+            <a:r>
+              <a:rPr lang="ko-KR" altLang="en-US" sz="1000">
+                <a:solidFill>
+                  <a:srgbClr val="000000"/>
+                </a:solidFill>
+                <a:latin typeface="맑은 고딕" panose="020B0503020000020004" pitchFamily="50" charset="-127"/>
+              </a:rPr>
+              <a:t>년 </a:t>
+            </a:r>
+            <a:r>
+              <a:rPr lang="en-US" altLang="ko-KR" sz="1000">
+                <a:solidFill>
+                  <a:srgbClr val="000000"/>
+                </a:solidFill>
+                <a:latin typeface="맑은 고딕" panose="020B0503020000020004" pitchFamily="50" charset="-127"/>
+              </a:rPr>
+              <a:t>4</a:t>
+            </a:r>
+            <a:r>
+              <a:rPr lang="ko-KR" altLang="en-US" sz="1000">
+                <a:solidFill>
+                  <a:srgbClr val="000000"/>
+                </a:solidFill>
+                <a:latin typeface="맑은 고딕" panose="020B0503020000020004" pitchFamily="50" charset="-127"/>
+              </a:rPr>
+              <a:t>월 </a:t>
+            </a:r>
+            <a:r>
+              <a:rPr lang="en-US" altLang="ko-KR" sz="1000">
+                <a:solidFill>
+                  <a:srgbClr val="000000"/>
+                </a:solidFill>
+                <a:latin typeface="맑은 고딕" panose="020B0503020000020004" pitchFamily="50" charset="-127"/>
+              </a:rPr>
+              <a:t>: </a:t>
+            </a:r>
+            <a:r>
+              <a:rPr lang="ko-KR" altLang="en-US" sz="1000">
+                <a:solidFill>
+                  <a:srgbClr val="000000"/>
+                </a:solidFill>
+                <a:latin typeface="맑은 고딕" panose="020B0503020000020004" pitchFamily="50" charset="-127"/>
+              </a:rPr>
+              <a:t>임국기</a:t>
+            </a:r>
+            <a:r>
+              <a:rPr lang="en-US" altLang="ko-KR" sz="1000">
+                <a:solidFill>
+                  <a:srgbClr val="000000"/>
+                </a:solidFill>
+                <a:latin typeface="맑은 고딕" panose="020B0503020000020004" pitchFamily="50" charset="-127"/>
+              </a:rPr>
+              <a:t>/</a:t>
+            </a:r>
+            <a:r>
+              <a:rPr lang="ko-KR" altLang="en-US" sz="1000">
+                <a:solidFill>
+                  <a:srgbClr val="000000"/>
+                </a:solidFill>
+                <a:latin typeface="맑은 고딕" panose="020B0503020000020004" pitchFamily="50" charset="-127"/>
+              </a:rPr>
+              <a:t>상무 </a:t>
+            </a:r>
+            <a:r>
+              <a:rPr lang="ko-KR" altLang="en-US" sz="1000" smtClean="0">
+                <a:solidFill>
+                  <a:srgbClr val="000000"/>
+                </a:solidFill>
+                <a:latin typeface="맑은 고딕" panose="020B0503020000020004" pitchFamily="50" charset="-127"/>
+              </a:rPr>
+              <a:t>입사</a:t>
+            </a:r>
+            <a:endParaRPr lang="en-US" altLang="ko-KR" sz="1000" smtClean="0">
+              <a:solidFill>
+                <a:srgbClr val="000000"/>
+              </a:solidFill>
+              <a:latin typeface="맑은 고딕" panose="020B0503020000020004" pitchFamily="50" charset="-127"/>
+            </a:endParaRPr>
+          </a:p>
+          <a:p>
+            <a:pPr latinLnBrk="0"/>
+            <a:r>
+              <a:rPr lang="en-US" altLang="ko-KR" sz="1000" smtClean="0">
+                <a:solidFill>
+                  <a:srgbClr val="000000"/>
+                </a:solidFill>
+                <a:latin typeface="맑은 고딕" panose="020B0503020000020004" pitchFamily="50" charset="-127"/>
+              </a:rPr>
+              <a:t>25</a:t>
+            </a:r>
+            <a:r>
+              <a:rPr lang="ko-KR" altLang="en-US" sz="1000">
+                <a:solidFill>
+                  <a:srgbClr val="000000"/>
+                </a:solidFill>
+                <a:latin typeface="맑은 고딕" panose="020B0503020000020004" pitchFamily="50" charset="-127"/>
+              </a:rPr>
+              <a:t>년 </a:t>
+            </a:r>
+            <a:r>
+              <a:rPr lang="en-US" altLang="ko-KR" sz="1000">
+                <a:solidFill>
+                  <a:srgbClr val="000000"/>
+                </a:solidFill>
+                <a:latin typeface="맑은 고딕" panose="020B0503020000020004" pitchFamily="50" charset="-127"/>
+              </a:rPr>
+              <a:t>4</a:t>
+            </a:r>
+            <a:r>
+              <a:rPr lang="ko-KR" altLang="en-US" sz="1000">
+                <a:solidFill>
+                  <a:srgbClr val="000000"/>
+                </a:solidFill>
+                <a:latin typeface="맑은 고딕" panose="020B0503020000020004" pitchFamily="50" charset="-127"/>
+              </a:rPr>
+              <a:t>월 </a:t>
+            </a:r>
+            <a:r>
+              <a:rPr lang="en-US" altLang="ko-KR" sz="1000">
+                <a:solidFill>
+                  <a:srgbClr val="000000"/>
+                </a:solidFill>
+                <a:latin typeface="맑은 고딕" panose="020B0503020000020004" pitchFamily="50" charset="-127"/>
+              </a:rPr>
+              <a:t>SPQA </a:t>
+            </a:r>
+            <a:r>
+              <a:rPr lang="ko-KR" altLang="en-US" sz="1000">
+                <a:solidFill>
+                  <a:srgbClr val="000000"/>
+                </a:solidFill>
+                <a:latin typeface="맑은 고딕" panose="020B0503020000020004" pitchFamily="50" charset="-127"/>
+              </a:rPr>
+              <a:t>프로젝트 육성을 위한 </a:t>
+            </a:r>
+            <a:r>
+              <a:rPr lang="en-US" altLang="ko-KR" sz="1000">
+                <a:solidFill>
+                  <a:srgbClr val="000000"/>
+                </a:solidFill>
+                <a:latin typeface="맑은 고딕" panose="020B0503020000020004" pitchFamily="50" charset="-127"/>
+              </a:rPr>
+              <a:t>1</a:t>
+            </a:r>
+            <a:r>
+              <a:rPr lang="ko-KR" altLang="en-US" sz="1000">
+                <a:solidFill>
+                  <a:srgbClr val="000000"/>
+                </a:solidFill>
+                <a:latin typeface="맑은 고딕" panose="020B0503020000020004" pitchFamily="50" charset="-127"/>
+              </a:rPr>
+              <a:t>차 컨설팅 진행 </a:t>
+            </a:r>
+            <a:r>
+              <a:rPr lang="en-US" altLang="ko-KR" sz="1000">
+                <a:solidFill>
+                  <a:srgbClr val="000000"/>
+                </a:solidFill>
+                <a:latin typeface="맑은 고딕" panose="020B0503020000020004" pitchFamily="50" charset="-127"/>
+              </a:rPr>
+              <a:t>: </a:t>
+            </a:r>
+            <a:r>
+              <a:rPr lang="ko-KR" altLang="en-US" sz="1000">
+                <a:solidFill>
+                  <a:srgbClr val="000000"/>
+                </a:solidFill>
+                <a:latin typeface="맑은 고딕" panose="020B0503020000020004" pitchFamily="50" charset="-127"/>
+              </a:rPr>
+              <a:t>씨앤비스 전민석</a:t>
+            </a:r>
+            <a:r>
+              <a:rPr lang="en-US" altLang="ko-KR" sz="1000">
+                <a:solidFill>
+                  <a:srgbClr val="000000"/>
+                </a:solidFill>
+                <a:latin typeface="맑은 고딕" panose="020B0503020000020004" pitchFamily="50" charset="-127"/>
+              </a:rPr>
+              <a:t>/</a:t>
+            </a:r>
+            <a:r>
+              <a:rPr lang="ko-KR" altLang="en-US" sz="1000">
+                <a:solidFill>
+                  <a:srgbClr val="000000"/>
+                </a:solidFill>
+                <a:latin typeface="맑은 고딕" panose="020B0503020000020004" pitchFamily="50" charset="-127"/>
+              </a:rPr>
+              <a:t>상무</a:t>
+            </a:r>
+          </a:p>
+          <a:p>
+            <a:pPr latinLnBrk="0"/>
+            <a:endParaRPr lang="en-US" altLang="ko-KR" sz="1000" smtClean="0">
+              <a:solidFill>
+                <a:srgbClr val="000000"/>
+              </a:solidFill>
+              <a:latin typeface="맑은 고딕" panose="020B0503020000020004" pitchFamily="50" charset="-127"/>
+            </a:endParaRPr>
+          </a:p>
+          <a:p>
+            <a:pPr latinLnBrk="0"/>
+            <a:r>
+              <a:rPr lang="en-US" altLang="ko-KR" sz="1000" smtClean="0">
+                <a:solidFill>
+                  <a:srgbClr val="000000"/>
+                </a:solidFill>
+                <a:latin typeface="맑은 고딕" panose="020B0503020000020004" pitchFamily="50" charset="-127"/>
+              </a:rPr>
+              <a:t>25</a:t>
+            </a:r>
+            <a:r>
+              <a:rPr lang="ko-KR" altLang="en-US" sz="1000">
+                <a:solidFill>
+                  <a:srgbClr val="000000"/>
+                </a:solidFill>
+                <a:latin typeface="맑은 고딕" panose="020B0503020000020004" pitchFamily="50" charset="-127"/>
+              </a:rPr>
+              <a:t>년 </a:t>
+            </a:r>
+            <a:r>
+              <a:rPr lang="en-US" altLang="ko-KR" sz="1000">
+                <a:solidFill>
+                  <a:srgbClr val="000000"/>
+                </a:solidFill>
+                <a:latin typeface="맑은 고딕" panose="020B0503020000020004" pitchFamily="50" charset="-127"/>
+              </a:rPr>
+              <a:t>5</a:t>
+            </a:r>
+            <a:r>
+              <a:rPr lang="ko-KR" altLang="en-US" sz="1000">
+                <a:solidFill>
+                  <a:srgbClr val="000000"/>
+                </a:solidFill>
+                <a:latin typeface="맑은 고딕" panose="020B0503020000020004" pitchFamily="50" charset="-127"/>
+              </a:rPr>
+              <a:t>월 </a:t>
+            </a:r>
+            <a:r>
+              <a:rPr lang="en-US" altLang="ko-KR" sz="1000">
+                <a:solidFill>
+                  <a:srgbClr val="000000"/>
+                </a:solidFill>
+                <a:latin typeface="맑은 고딕" panose="020B0503020000020004" pitchFamily="50" charset="-127"/>
+              </a:rPr>
+              <a:t>SPQA </a:t>
+            </a:r>
+            <a:r>
+              <a:rPr lang="ko-KR" altLang="en-US" sz="1000">
+                <a:solidFill>
+                  <a:srgbClr val="000000"/>
+                </a:solidFill>
+                <a:latin typeface="맑은 고딕" panose="020B0503020000020004" pitchFamily="50" charset="-127"/>
+              </a:rPr>
+              <a:t>프로젝트 대응을 위한 임시 조직도 발표 </a:t>
+            </a:r>
+            <a:r>
+              <a:rPr lang="en-US" altLang="ko-KR" sz="1000">
+                <a:solidFill>
+                  <a:srgbClr val="000000"/>
+                </a:solidFill>
+                <a:latin typeface="맑은 고딕" panose="020B0503020000020004" pitchFamily="50" charset="-127"/>
+              </a:rPr>
+              <a:t>: </a:t>
+            </a:r>
+            <a:r>
+              <a:rPr lang="ko-KR" altLang="en-US" sz="1000">
+                <a:solidFill>
+                  <a:srgbClr val="000000"/>
+                </a:solidFill>
+                <a:latin typeface="맑은 고딕" panose="020B0503020000020004" pitchFamily="50" charset="-127"/>
+              </a:rPr>
+              <a:t>정재형</a:t>
+            </a:r>
+            <a:r>
+              <a:rPr lang="en-US" altLang="ko-KR" sz="1000">
+                <a:solidFill>
+                  <a:srgbClr val="000000"/>
+                </a:solidFill>
+                <a:latin typeface="맑은 고딕" panose="020B0503020000020004" pitchFamily="50" charset="-127"/>
+              </a:rPr>
+              <a:t>/</a:t>
+            </a:r>
+            <a:r>
+              <a:rPr lang="ko-KR" altLang="en-US" sz="1000" smtClean="0">
+                <a:solidFill>
+                  <a:srgbClr val="000000"/>
+                </a:solidFill>
+                <a:latin typeface="맑은 고딕" panose="020B0503020000020004" pitchFamily="50" charset="-127"/>
+              </a:rPr>
+              <a:t>수석</a:t>
+            </a:r>
+            <a:endParaRPr lang="en-US" altLang="ko-KR" sz="1000" smtClean="0">
+              <a:solidFill>
+                <a:srgbClr val="000000"/>
+              </a:solidFill>
+              <a:latin typeface="맑은 고딕" panose="020B0503020000020004" pitchFamily="50" charset="-127"/>
+            </a:endParaRPr>
+          </a:p>
+          <a:p>
+            <a:pPr latinLnBrk="0"/>
+            <a:endParaRPr lang="ko-KR" altLang="en-US" sz="1000">
+              <a:solidFill>
+                <a:srgbClr val="000000"/>
+              </a:solidFill>
+              <a:latin typeface="맑은 고딕" panose="020B0503020000020004" pitchFamily="50" charset="-127"/>
+            </a:endParaRPr>
+          </a:p>
+          <a:p>
+            <a:pPr latinLnBrk="0"/>
+            <a:r>
+              <a:rPr lang="en-US" altLang="ko-KR" sz="1000">
+                <a:solidFill>
+                  <a:srgbClr val="000000"/>
+                </a:solidFill>
+                <a:latin typeface="맑은 고딕" panose="020B0503020000020004" pitchFamily="50" charset="-127"/>
+              </a:rPr>
+              <a:t>25</a:t>
+            </a:r>
+            <a:r>
+              <a:rPr lang="ko-KR" altLang="en-US" sz="1000">
+                <a:solidFill>
+                  <a:srgbClr val="000000"/>
+                </a:solidFill>
+                <a:latin typeface="맑은 고딕" panose="020B0503020000020004" pitchFamily="50" charset="-127"/>
+              </a:rPr>
+              <a:t>년 </a:t>
+            </a:r>
+            <a:r>
+              <a:rPr lang="en-US" altLang="ko-KR" sz="1000">
+                <a:solidFill>
+                  <a:srgbClr val="000000"/>
+                </a:solidFill>
+                <a:latin typeface="맑은 고딕" panose="020B0503020000020004" pitchFamily="50" charset="-127"/>
+              </a:rPr>
+              <a:t>6</a:t>
+            </a:r>
+            <a:r>
+              <a:rPr lang="ko-KR" altLang="en-US" sz="1000">
+                <a:solidFill>
+                  <a:srgbClr val="000000"/>
+                </a:solidFill>
+                <a:latin typeface="맑은 고딕" panose="020B0503020000020004" pitchFamily="50" charset="-127"/>
+              </a:rPr>
+              <a:t>월 </a:t>
+            </a:r>
+            <a:r>
+              <a:rPr lang="en-US" altLang="ko-KR" sz="1000">
+                <a:solidFill>
+                  <a:srgbClr val="000000"/>
+                </a:solidFill>
+                <a:latin typeface="맑은 고딕" panose="020B0503020000020004" pitchFamily="50" charset="-127"/>
+              </a:rPr>
+              <a:t>2</a:t>
+            </a:r>
+            <a:r>
+              <a:rPr lang="ko-KR" altLang="en-US" sz="1000">
+                <a:solidFill>
+                  <a:srgbClr val="000000"/>
+                </a:solidFill>
+                <a:latin typeface="맑은 고딕" panose="020B0503020000020004" pitchFamily="50" charset="-127"/>
+              </a:rPr>
+              <a:t>일 </a:t>
+            </a:r>
+            <a:r>
+              <a:rPr lang="en-US" altLang="ko-KR" sz="1000">
+                <a:solidFill>
+                  <a:srgbClr val="000000"/>
+                </a:solidFill>
+                <a:latin typeface="맑은 고딕" panose="020B0503020000020004" pitchFamily="50" charset="-127"/>
+              </a:rPr>
+              <a:t>ALM </a:t>
+            </a:r>
+            <a:r>
+              <a:rPr lang="ko-KR" altLang="en-US" sz="1000">
+                <a:solidFill>
+                  <a:srgbClr val="000000"/>
+                </a:solidFill>
+                <a:latin typeface="맑은 고딕" panose="020B0503020000020004" pitchFamily="50" charset="-127"/>
+              </a:rPr>
+              <a:t>도입</a:t>
+            </a:r>
+          </a:p>
+          <a:p>
+            <a:pPr latinLnBrk="0"/>
+            <a:r>
+              <a:rPr lang="en-US" altLang="ko-KR" sz="1000">
+                <a:solidFill>
+                  <a:srgbClr val="000000"/>
+                </a:solidFill>
+                <a:latin typeface="맑은 고딕" panose="020B0503020000020004" pitchFamily="50" charset="-127"/>
+              </a:rPr>
+              <a:t>25</a:t>
+            </a:r>
+            <a:r>
+              <a:rPr lang="ko-KR" altLang="en-US" sz="1000">
+                <a:solidFill>
+                  <a:srgbClr val="000000"/>
+                </a:solidFill>
+                <a:latin typeface="맑은 고딕" panose="020B0503020000020004" pitchFamily="50" charset="-127"/>
+              </a:rPr>
+              <a:t>년 </a:t>
+            </a:r>
+            <a:r>
+              <a:rPr lang="en-US" altLang="ko-KR" sz="1000">
+                <a:solidFill>
+                  <a:srgbClr val="000000"/>
+                </a:solidFill>
+                <a:latin typeface="맑은 고딕" panose="020B0503020000020004" pitchFamily="50" charset="-127"/>
+              </a:rPr>
+              <a:t>6</a:t>
+            </a:r>
+            <a:r>
+              <a:rPr lang="ko-KR" altLang="en-US" sz="1000">
+                <a:solidFill>
+                  <a:srgbClr val="000000"/>
+                </a:solidFill>
+                <a:latin typeface="맑은 고딕" panose="020B0503020000020004" pitchFamily="50" charset="-127"/>
+              </a:rPr>
+              <a:t>월 </a:t>
+            </a:r>
+            <a:r>
+              <a:rPr lang="en-US" altLang="ko-KR" sz="1000">
+                <a:solidFill>
+                  <a:srgbClr val="000000"/>
+                </a:solidFill>
+                <a:latin typeface="맑은 고딕" panose="020B0503020000020004" pitchFamily="50" charset="-127"/>
+              </a:rPr>
+              <a:t>9</a:t>
+            </a:r>
+            <a:r>
+              <a:rPr lang="ko-KR" altLang="en-US" sz="1000">
+                <a:solidFill>
+                  <a:srgbClr val="000000"/>
+                </a:solidFill>
+                <a:latin typeface="맑은 고딕" panose="020B0503020000020004" pitchFamily="50" charset="-127"/>
+              </a:rPr>
+              <a:t>일 최승찬</a:t>
+            </a:r>
+            <a:r>
+              <a:rPr lang="en-US" altLang="ko-KR" sz="1000">
+                <a:solidFill>
+                  <a:srgbClr val="000000"/>
+                </a:solidFill>
+                <a:latin typeface="맑은 고딕" panose="020B0503020000020004" pitchFamily="50" charset="-127"/>
+              </a:rPr>
+              <a:t>/</a:t>
+            </a:r>
+            <a:r>
+              <a:rPr lang="ko-KR" altLang="en-US" sz="1000">
+                <a:solidFill>
+                  <a:srgbClr val="000000"/>
+                </a:solidFill>
+                <a:latin typeface="맑은 고딕" panose="020B0503020000020004" pitchFamily="50" charset="-127"/>
+              </a:rPr>
+              <a:t>책임 </a:t>
+            </a:r>
+            <a:r>
+              <a:rPr lang="ko-KR" altLang="en-US" sz="1000" smtClean="0">
+                <a:solidFill>
+                  <a:srgbClr val="000000"/>
+                </a:solidFill>
+                <a:latin typeface="맑은 고딕" panose="020B0503020000020004" pitchFamily="50" charset="-127"/>
+              </a:rPr>
+              <a:t>입사</a:t>
+            </a:r>
+            <a:endParaRPr lang="en-US" altLang="ko-KR" sz="1000" smtClean="0">
+              <a:solidFill>
+                <a:srgbClr val="000000"/>
+              </a:solidFill>
+              <a:latin typeface="맑은 고딕" panose="020B0503020000020004" pitchFamily="50" charset="-127"/>
+            </a:endParaRPr>
+          </a:p>
+          <a:p>
+            <a:pPr latinLnBrk="0"/>
+            <a:endParaRPr lang="en-US" altLang="ko-KR" sz="1000" smtClean="0">
+              <a:solidFill>
+                <a:srgbClr val="000000"/>
+              </a:solidFill>
+              <a:latin typeface="맑은 고딕" panose="020B0503020000020004" pitchFamily="50" charset="-127"/>
+            </a:endParaRPr>
+          </a:p>
+          <a:p>
+            <a:pPr latinLnBrk="0"/>
+            <a:r>
+              <a:rPr lang="en-US" altLang="ko-KR" sz="1000" smtClean="0">
+                <a:solidFill>
+                  <a:srgbClr val="000000"/>
+                </a:solidFill>
+                <a:latin typeface="맑은 고딕" panose="020B0503020000020004" pitchFamily="50" charset="-127"/>
+              </a:rPr>
+              <a:t>25</a:t>
+            </a:r>
+            <a:r>
+              <a:rPr lang="ko-KR" altLang="en-US" sz="1000">
+                <a:solidFill>
+                  <a:srgbClr val="000000"/>
+                </a:solidFill>
+                <a:latin typeface="맑은 고딕" panose="020B0503020000020004" pitchFamily="50" charset="-127"/>
+              </a:rPr>
+              <a:t>년 </a:t>
+            </a:r>
+            <a:r>
+              <a:rPr lang="en-US" altLang="ko-KR" sz="1000">
+                <a:solidFill>
+                  <a:srgbClr val="000000"/>
+                </a:solidFill>
+                <a:latin typeface="맑은 고딕" panose="020B0503020000020004" pitchFamily="50" charset="-127"/>
+              </a:rPr>
+              <a:t>6</a:t>
+            </a:r>
+            <a:r>
+              <a:rPr lang="ko-KR" altLang="en-US" sz="1000">
+                <a:solidFill>
+                  <a:srgbClr val="000000"/>
+                </a:solidFill>
+                <a:latin typeface="맑은 고딕" panose="020B0503020000020004" pitchFamily="50" charset="-127"/>
+              </a:rPr>
+              <a:t>월 </a:t>
+            </a:r>
+            <a:r>
+              <a:rPr lang="en-US" altLang="ko-KR" sz="1000">
+                <a:solidFill>
+                  <a:srgbClr val="000000"/>
+                </a:solidFill>
+                <a:latin typeface="맑은 고딕" panose="020B0503020000020004" pitchFamily="50" charset="-127"/>
+              </a:rPr>
+              <a:t>12</a:t>
+            </a:r>
+            <a:r>
+              <a:rPr lang="ko-KR" altLang="en-US" sz="1000">
+                <a:solidFill>
+                  <a:srgbClr val="000000"/>
+                </a:solidFill>
+                <a:latin typeface="맑은 고딕" panose="020B0503020000020004" pitchFamily="50" charset="-127"/>
+              </a:rPr>
+              <a:t>일부터 </a:t>
+            </a:r>
+            <a:r>
+              <a:rPr lang="en-US" altLang="ko-KR" sz="1000">
+                <a:solidFill>
+                  <a:srgbClr val="000000"/>
+                </a:solidFill>
+                <a:latin typeface="맑은 고딕" panose="020B0503020000020004" pitchFamily="50" charset="-127"/>
+              </a:rPr>
+              <a:t>ALM </a:t>
+            </a:r>
+            <a:r>
+              <a:rPr lang="en-US" altLang="ko-KR" sz="1000">
+                <a:solidFill>
+                  <a:srgbClr val="000000"/>
+                </a:solidFill>
+                <a:latin typeface="맑은 고딕" panose="020B0503020000020004" pitchFamily="50" charset="-127"/>
+              </a:rPr>
+              <a:t>Setup </a:t>
+            </a:r>
+            <a:r>
+              <a:rPr lang="ko-KR" altLang="en-US" sz="1000" smtClean="0">
+                <a:solidFill>
+                  <a:srgbClr val="000000"/>
+                </a:solidFill>
+                <a:latin typeface="맑은 고딕" panose="020B0503020000020004" pitchFamily="50" charset="-127"/>
+              </a:rPr>
+              <a:t>시작 </a:t>
+            </a:r>
+            <a:r>
+              <a:rPr lang="en-US" altLang="ko-KR" sz="1000" smtClean="0">
+                <a:solidFill>
+                  <a:srgbClr val="000000"/>
+                </a:solidFill>
+                <a:latin typeface="맑은 고딕" panose="020B0503020000020004" pitchFamily="50" charset="-127"/>
+              </a:rPr>
+              <a:t>(</a:t>
+            </a:r>
+            <a:r>
+              <a:rPr lang="ko-KR" altLang="en-US" sz="1000" smtClean="0">
+                <a:solidFill>
+                  <a:srgbClr val="000000"/>
+                </a:solidFill>
+                <a:latin typeface="맑은 고딕" panose="020B0503020000020004" pitchFamily="50" charset="-127"/>
+              </a:rPr>
+              <a:t>최승찬 책임 진행</a:t>
+            </a:r>
+            <a:r>
+              <a:rPr lang="en-US" altLang="ko-KR" sz="1000" smtClean="0">
+                <a:solidFill>
+                  <a:srgbClr val="000000"/>
+                </a:solidFill>
+                <a:latin typeface="맑은 고딕" panose="020B0503020000020004" pitchFamily="50" charset="-127"/>
+              </a:rPr>
+              <a:t>)</a:t>
+            </a:r>
+          </a:p>
+          <a:p>
+            <a:pPr latinLnBrk="0"/>
+            <a:endParaRPr lang="en-US" altLang="ko-KR" sz="1000">
+              <a:solidFill>
+                <a:srgbClr val="000000"/>
+              </a:solidFill>
+              <a:latin typeface="맑은 고딕" panose="020B0503020000020004" pitchFamily="50" charset="-127"/>
+            </a:endParaRPr>
+          </a:p>
+          <a:p>
+            <a:pPr latinLnBrk="0"/>
+            <a:r>
+              <a:rPr lang="en-US" altLang="ko-KR" sz="1000" smtClean="0">
+                <a:solidFill>
+                  <a:srgbClr val="000000"/>
+                </a:solidFill>
+                <a:latin typeface="맑은 고딕" panose="020B0503020000020004" pitchFamily="50" charset="-127"/>
+              </a:rPr>
+              <a:t>25</a:t>
+            </a:r>
+            <a:r>
+              <a:rPr lang="ko-KR" altLang="en-US" sz="1000">
+                <a:solidFill>
+                  <a:srgbClr val="000000"/>
+                </a:solidFill>
+                <a:latin typeface="맑은 고딕" panose="020B0503020000020004" pitchFamily="50" charset="-127"/>
+              </a:rPr>
+              <a:t>년 </a:t>
+            </a:r>
+            <a:r>
+              <a:rPr lang="en-US" altLang="ko-KR" sz="1000">
+                <a:solidFill>
+                  <a:srgbClr val="000000"/>
+                </a:solidFill>
+                <a:latin typeface="맑은 고딕" panose="020B0503020000020004" pitchFamily="50" charset="-127"/>
+              </a:rPr>
+              <a:t>6</a:t>
+            </a:r>
+            <a:r>
+              <a:rPr lang="ko-KR" altLang="en-US" sz="1000">
+                <a:solidFill>
+                  <a:srgbClr val="000000"/>
+                </a:solidFill>
+                <a:latin typeface="맑은 고딕" panose="020B0503020000020004" pitchFamily="50" charset="-127"/>
+              </a:rPr>
+              <a:t>월 </a:t>
+            </a:r>
+            <a:r>
+              <a:rPr lang="en-US" altLang="ko-KR" sz="1000">
+                <a:solidFill>
+                  <a:srgbClr val="000000"/>
+                </a:solidFill>
+                <a:latin typeface="맑은 고딕" panose="020B0503020000020004" pitchFamily="50" charset="-127"/>
+              </a:rPr>
+              <a:t>27</a:t>
+            </a:r>
+            <a:r>
+              <a:rPr lang="ko-KR" altLang="en-US" sz="1000">
+                <a:solidFill>
+                  <a:srgbClr val="000000"/>
+                </a:solidFill>
+                <a:latin typeface="맑은 고딕" panose="020B0503020000020004" pitchFamily="50" charset="-127"/>
+              </a:rPr>
+              <a:t>일 </a:t>
+            </a:r>
+            <a:r>
+              <a:rPr lang="en-US" altLang="ko-KR" sz="1000">
+                <a:solidFill>
+                  <a:srgbClr val="000000"/>
+                </a:solidFill>
+                <a:latin typeface="맑은 고딕" panose="020B0503020000020004" pitchFamily="50" charset="-127"/>
+              </a:rPr>
+              <a:t>SPQA </a:t>
+            </a:r>
+            <a:r>
+              <a:rPr lang="ko-KR" altLang="en-US" sz="1000">
+                <a:solidFill>
+                  <a:srgbClr val="000000"/>
+                </a:solidFill>
+                <a:latin typeface="맑은 고딕" panose="020B0503020000020004" pitchFamily="50" charset="-127"/>
+              </a:rPr>
+              <a:t>프로젝트 대응 전담 조직 확정을 위한 </a:t>
+            </a:r>
+            <a:r>
+              <a:rPr lang="en-US" altLang="ko-KR" sz="1000">
+                <a:solidFill>
+                  <a:srgbClr val="000000"/>
+                </a:solidFill>
+                <a:latin typeface="맑은 고딕" panose="020B0503020000020004" pitchFamily="50" charset="-127"/>
+              </a:rPr>
+              <a:t>Pre-Kick off </a:t>
+            </a:r>
+            <a:r>
+              <a:rPr lang="ko-KR" altLang="en-US" sz="1000">
+                <a:solidFill>
+                  <a:srgbClr val="000000"/>
+                </a:solidFill>
+                <a:latin typeface="맑은 고딕" panose="020B0503020000020004" pitchFamily="50" charset="-127"/>
+              </a:rPr>
+              <a:t>미팅 </a:t>
+            </a:r>
+            <a:r>
+              <a:rPr lang="ko-KR" altLang="en-US" sz="1000" smtClean="0">
+                <a:solidFill>
+                  <a:srgbClr val="000000"/>
+                </a:solidFill>
+                <a:latin typeface="맑은 고딕" panose="020B0503020000020004" pitchFamily="50" charset="-127"/>
+              </a:rPr>
+              <a:t>진행</a:t>
+            </a:r>
+            <a:endParaRPr lang="en-US" altLang="ko-KR" sz="1000" smtClean="0">
+              <a:solidFill>
+                <a:srgbClr val="000000"/>
+              </a:solidFill>
+              <a:latin typeface="맑은 고딕" panose="020B0503020000020004" pitchFamily="50" charset="-127"/>
+            </a:endParaRPr>
+          </a:p>
+          <a:p>
+            <a:pPr latinLnBrk="0"/>
+            <a:endParaRPr lang="ko-KR" altLang="en-US" sz="1000">
+              <a:solidFill>
+                <a:srgbClr val="000000"/>
+              </a:solidFill>
+              <a:latin typeface="맑은 고딕" panose="020B0503020000020004" pitchFamily="50" charset="-127"/>
+            </a:endParaRPr>
+          </a:p>
+          <a:p>
+            <a:pPr latinLnBrk="0"/>
+            <a:r>
+              <a:rPr lang="en-US" altLang="ko-KR" sz="1000">
+                <a:solidFill>
+                  <a:srgbClr val="000000"/>
+                </a:solidFill>
+                <a:latin typeface="맑은 고딕" panose="020B0503020000020004" pitchFamily="50" charset="-127"/>
+              </a:rPr>
+              <a:t>25</a:t>
+            </a:r>
+            <a:r>
+              <a:rPr lang="ko-KR" altLang="en-US" sz="1000">
+                <a:solidFill>
+                  <a:srgbClr val="000000"/>
+                </a:solidFill>
+                <a:latin typeface="맑은 고딕" panose="020B0503020000020004" pitchFamily="50" charset="-127"/>
+              </a:rPr>
+              <a:t>년 </a:t>
+            </a:r>
+            <a:r>
+              <a:rPr lang="en-US" altLang="ko-KR" sz="1000">
+                <a:solidFill>
+                  <a:srgbClr val="000000"/>
+                </a:solidFill>
+                <a:latin typeface="맑은 고딕" panose="020B0503020000020004" pitchFamily="50" charset="-127"/>
+              </a:rPr>
+              <a:t>7</a:t>
+            </a:r>
+            <a:r>
+              <a:rPr lang="ko-KR" altLang="en-US" sz="1000">
+                <a:solidFill>
+                  <a:srgbClr val="000000"/>
+                </a:solidFill>
+                <a:latin typeface="맑은 고딕" panose="020B0503020000020004" pitchFamily="50" charset="-127"/>
+              </a:rPr>
+              <a:t>월 </a:t>
+            </a:r>
+            <a:r>
+              <a:rPr lang="en-US" altLang="ko-KR" sz="1000">
+                <a:solidFill>
+                  <a:srgbClr val="000000"/>
+                </a:solidFill>
+                <a:latin typeface="맑은 고딕" panose="020B0503020000020004" pitchFamily="50" charset="-127"/>
+              </a:rPr>
+              <a:t>14</a:t>
+            </a:r>
+            <a:r>
+              <a:rPr lang="ko-KR" altLang="en-US" sz="1000">
+                <a:solidFill>
+                  <a:srgbClr val="000000"/>
+                </a:solidFill>
+                <a:latin typeface="맑은 고딕" panose="020B0503020000020004" pitchFamily="50" charset="-127"/>
+              </a:rPr>
+              <a:t>일 이대운</a:t>
+            </a:r>
+            <a:r>
+              <a:rPr lang="en-US" altLang="ko-KR" sz="1000">
+                <a:solidFill>
+                  <a:srgbClr val="000000"/>
+                </a:solidFill>
+                <a:latin typeface="맑은 고딕" panose="020B0503020000020004" pitchFamily="50" charset="-127"/>
+              </a:rPr>
+              <a:t>/</a:t>
+            </a:r>
+            <a:r>
+              <a:rPr lang="ko-KR" altLang="en-US" sz="1000">
+                <a:solidFill>
+                  <a:srgbClr val="000000"/>
+                </a:solidFill>
+                <a:latin typeface="맑은 고딕" panose="020B0503020000020004" pitchFamily="50" charset="-127"/>
+              </a:rPr>
+              <a:t>선임 입사</a:t>
+            </a:r>
+            <a:r>
+              <a:rPr lang="en-US" altLang="ko-KR" sz="1000">
+                <a:solidFill>
+                  <a:srgbClr val="000000"/>
+                </a:solidFill>
+                <a:latin typeface="맑은 고딕" panose="020B0503020000020004" pitchFamily="50" charset="-127"/>
+              </a:rPr>
+              <a:t>, ALM </a:t>
+            </a:r>
+            <a:r>
+              <a:rPr lang="en-US" altLang="ko-KR" sz="1000">
+                <a:solidFill>
+                  <a:srgbClr val="000000"/>
+                </a:solidFill>
+                <a:latin typeface="맑은 고딕" panose="020B0503020000020004" pitchFamily="50" charset="-127"/>
+              </a:rPr>
+              <a:t>Setup </a:t>
+            </a:r>
+            <a:r>
+              <a:rPr lang="ko-KR" altLang="en-US" sz="1000" smtClean="0">
+                <a:solidFill>
+                  <a:srgbClr val="000000"/>
+                </a:solidFill>
+                <a:latin typeface="맑은 고딕" panose="020B0503020000020004" pitchFamily="50" charset="-127"/>
+              </a:rPr>
+              <a:t>진행 </a:t>
+            </a:r>
+            <a:r>
+              <a:rPr lang="en-US" altLang="ko-KR" sz="1000" smtClean="0">
+                <a:solidFill>
+                  <a:srgbClr val="000000"/>
+                </a:solidFill>
+                <a:latin typeface="맑은 고딕" panose="020B0503020000020004" pitchFamily="50" charset="-127"/>
+              </a:rPr>
+              <a:t>(</a:t>
+            </a:r>
+            <a:r>
+              <a:rPr lang="ko-KR" altLang="en-US" sz="1000" smtClean="0">
+                <a:solidFill>
+                  <a:srgbClr val="000000"/>
+                </a:solidFill>
+                <a:latin typeface="맑은 고딕" panose="020B0503020000020004" pitchFamily="50" charset="-127"/>
+              </a:rPr>
+              <a:t>최승찬 책임</a:t>
+            </a:r>
+            <a:r>
+              <a:rPr lang="en-US" altLang="ko-KR" sz="1000" smtClean="0">
+                <a:solidFill>
+                  <a:srgbClr val="000000"/>
+                </a:solidFill>
+                <a:latin typeface="맑은 고딕" panose="020B0503020000020004" pitchFamily="50" charset="-127"/>
+              </a:rPr>
+              <a:t>, </a:t>
+            </a:r>
+            <a:r>
+              <a:rPr lang="ko-KR" altLang="en-US" sz="1000" smtClean="0">
+                <a:solidFill>
+                  <a:srgbClr val="000000"/>
+                </a:solidFill>
+                <a:latin typeface="맑은 고딕" panose="020B0503020000020004" pitchFamily="50" charset="-127"/>
+              </a:rPr>
+              <a:t>이대운 선임</a:t>
+            </a:r>
+            <a:r>
+              <a:rPr lang="en-US" altLang="ko-KR" sz="1000" smtClean="0">
+                <a:solidFill>
+                  <a:srgbClr val="000000"/>
+                </a:solidFill>
+                <a:latin typeface="맑은 고딕" panose="020B0503020000020004" pitchFamily="50" charset="-127"/>
+              </a:rPr>
+              <a:t>)</a:t>
+            </a:r>
+          </a:p>
+          <a:p>
+            <a:pPr latinLnBrk="0"/>
+            <a:endParaRPr lang="ko-KR" altLang="en-US" sz="1000">
+              <a:solidFill>
+                <a:srgbClr val="000000"/>
+              </a:solidFill>
+              <a:latin typeface="맑은 고딕" panose="020B0503020000020004" pitchFamily="50" charset="-127"/>
+            </a:endParaRPr>
+          </a:p>
+          <a:p>
+            <a:pPr latinLnBrk="0"/>
+            <a:r>
+              <a:rPr lang="en-US" altLang="ko-KR" sz="1000">
+                <a:solidFill>
+                  <a:srgbClr val="000000"/>
+                </a:solidFill>
+                <a:latin typeface="맑은 고딕" panose="020B0503020000020004" pitchFamily="50" charset="-127"/>
+              </a:rPr>
+              <a:t>25</a:t>
+            </a:r>
+            <a:r>
+              <a:rPr lang="ko-KR" altLang="en-US" sz="1000">
+                <a:solidFill>
+                  <a:srgbClr val="000000"/>
+                </a:solidFill>
+                <a:latin typeface="맑은 고딕" panose="020B0503020000020004" pitchFamily="50" charset="-127"/>
+              </a:rPr>
+              <a:t>년 </a:t>
+            </a:r>
+            <a:r>
+              <a:rPr lang="en-US" altLang="ko-KR" sz="1000">
+                <a:solidFill>
+                  <a:srgbClr val="000000"/>
+                </a:solidFill>
+                <a:latin typeface="맑은 고딕" panose="020B0503020000020004" pitchFamily="50" charset="-127"/>
+              </a:rPr>
+              <a:t>7</a:t>
+            </a:r>
+            <a:r>
+              <a:rPr lang="ko-KR" altLang="en-US" sz="1000">
+                <a:solidFill>
+                  <a:srgbClr val="000000"/>
+                </a:solidFill>
+                <a:latin typeface="맑은 고딕" panose="020B0503020000020004" pitchFamily="50" charset="-127"/>
+              </a:rPr>
+              <a:t>월 </a:t>
+            </a:r>
+            <a:r>
+              <a:rPr lang="en-US" altLang="ko-KR" sz="1000">
+                <a:solidFill>
+                  <a:srgbClr val="000000"/>
+                </a:solidFill>
+                <a:latin typeface="맑은 고딕" panose="020B0503020000020004" pitchFamily="50" charset="-127"/>
+              </a:rPr>
+              <a:t>22</a:t>
+            </a:r>
+            <a:r>
+              <a:rPr lang="ko-KR" altLang="en-US" sz="1000">
+                <a:solidFill>
+                  <a:srgbClr val="000000"/>
+                </a:solidFill>
+                <a:latin typeface="맑은 고딕" panose="020B0503020000020004" pitchFamily="50" charset="-127"/>
+              </a:rPr>
+              <a:t>일 </a:t>
+            </a:r>
+            <a:r>
+              <a:rPr lang="en-US" altLang="ko-KR" sz="1000">
+                <a:solidFill>
+                  <a:srgbClr val="000000"/>
+                </a:solidFill>
+                <a:latin typeface="맑은 고딕" panose="020B0503020000020004" pitchFamily="50" charset="-127"/>
+              </a:rPr>
+              <a:t>SPQA </a:t>
+            </a:r>
+            <a:r>
+              <a:rPr lang="ko-KR" altLang="en-US" sz="1000">
+                <a:solidFill>
+                  <a:srgbClr val="000000"/>
+                </a:solidFill>
+                <a:latin typeface="맑은 고딕" panose="020B0503020000020004" pitchFamily="50" charset="-127"/>
+              </a:rPr>
+              <a:t>프로젝트 담당자 일부 확정</a:t>
+            </a:r>
+            <a:r>
+              <a:rPr lang="ko-KR" altLang="en-US" sz="1000">
+                <a:solidFill>
+                  <a:srgbClr val="000000"/>
+                </a:solidFill>
+                <a:latin typeface="맑은 고딕" panose="020B0503020000020004" pitchFamily="50" charset="-127"/>
+              </a:rPr>
+              <a:t/>
+            </a:r>
+            <a:br>
+              <a:rPr lang="ko-KR" altLang="en-US" sz="1000">
+                <a:solidFill>
+                  <a:srgbClr val="000000"/>
+                </a:solidFill>
+                <a:latin typeface="맑은 고딕" panose="020B0503020000020004" pitchFamily="50" charset="-127"/>
+              </a:rPr>
+            </a:br>
+            <a:r>
+              <a:rPr lang="ko-KR" altLang="en-US" sz="1000" smtClean="0">
+                <a:solidFill>
+                  <a:srgbClr val="000000"/>
+                </a:solidFill>
+                <a:latin typeface="맑은 고딕" panose="020B0503020000020004" pitchFamily="50" charset="-127"/>
+              </a:rPr>
+              <a:t>    </a:t>
+            </a:r>
+            <a:r>
+              <a:rPr lang="en-US" altLang="ko-KR" sz="1000" smtClean="0">
+                <a:solidFill>
+                  <a:srgbClr val="000000"/>
+                </a:solidFill>
+                <a:latin typeface="맑은 고딕" panose="020B0503020000020004" pitchFamily="50" charset="-127"/>
+              </a:rPr>
+              <a:t>- </a:t>
+            </a:r>
+            <a:r>
+              <a:rPr lang="en-US" altLang="ko-KR" sz="1000">
+                <a:solidFill>
+                  <a:srgbClr val="000000"/>
+                </a:solidFill>
+                <a:latin typeface="맑은 고딕" panose="020B0503020000020004" pitchFamily="50" charset="-127"/>
+              </a:rPr>
+              <a:t>SYS, SWE. SUP1(QA), MAN.3(PM) </a:t>
+            </a:r>
+            <a:r>
+              <a:rPr lang="ko-KR" altLang="en-US" sz="1000">
+                <a:solidFill>
+                  <a:srgbClr val="000000"/>
+                </a:solidFill>
+                <a:latin typeface="맑은 고딕" panose="020B0503020000020004" pitchFamily="50" charset="-127"/>
+              </a:rPr>
+              <a:t>담당자 </a:t>
+            </a:r>
+            <a:r>
+              <a:rPr lang="ko-KR" altLang="en-US" sz="1000" smtClean="0">
+                <a:solidFill>
+                  <a:srgbClr val="000000"/>
+                </a:solidFill>
+                <a:latin typeface="맑은 고딕" panose="020B0503020000020004" pitchFamily="50" charset="-127"/>
+              </a:rPr>
+              <a:t>확정</a:t>
+            </a:r>
+            <a:endParaRPr lang="en-US" altLang="ko-KR" sz="1000" smtClean="0">
+              <a:solidFill>
+                <a:srgbClr val="000000"/>
+              </a:solidFill>
+              <a:latin typeface="맑은 고딕" panose="020B0503020000020004" pitchFamily="50" charset="-127"/>
+            </a:endParaRPr>
+          </a:p>
+          <a:p>
+            <a:pPr latinLnBrk="0"/>
+            <a:endParaRPr lang="ko-KR" altLang="en-US" sz="1000">
+              <a:solidFill>
+                <a:srgbClr val="000000"/>
+              </a:solidFill>
+              <a:latin typeface="맑은 고딕" panose="020B0503020000020004" pitchFamily="50" charset="-127"/>
+            </a:endParaRPr>
+          </a:p>
+          <a:p>
+            <a:pPr latinLnBrk="0"/>
+            <a:r>
+              <a:rPr lang="en-US" altLang="ko-KR" sz="1000">
+                <a:solidFill>
+                  <a:srgbClr val="000000"/>
+                </a:solidFill>
+                <a:latin typeface="맑은 고딕" panose="020B0503020000020004" pitchFamily="50" charset="-127"/>
+              </a:rPr>
+              <a:t>25</a:t>
+            </a:r>
+            <a:r>
+              <a:rPr lang="ko-KR" altLang="en-US" sz="1000">
+                <a:solidFill>
+                  <a:srgbClr val="000000"/>
+                </a:solidFill>
+                <a:latin typeface="맑은 고딕" panose="020B0503020000020004" pitchFamily="50" charset="-127"/>
+              </a:rPr>
+              <a:t>년 </a:t>
+            </a:r>
+            <a:r>
+              <a:rPr lang="en-US" altLang="ko-KR" sz="1000">
+                <a:solidFill>
+                  <a:srgbClr val="000000"/>
+                </a:solidFill>
+                <a:latin typeface="맑은 고딕" panose="020B0503020000020004" pitchFamily="50" charset="-127"/>
+              </a:rPr>
+              <a:t>8</a:t>
+            </a:r>
+            <a:r>
+              <a:rPr lang="ko-KR" altLang="en-US" sz="1000">
+                <a:solidFill>
+                  <a:srgbClr val="000000"/>
+                </a:solidFill>
+                <a:latin typeface="맑은 고딕" panose="020B0503020000020004" pitchFamily="50" charset="-127"/>
+              </a:rPr>
+              <a:t>월 </a:t>
+            </a:r>
+            <a:r>
+              <a:rPr lang="en-US" altLang="ko-KR" sz="1000">
+                <a:solidFill>
+                  <a:srgbClr val="000000"/>
+                </a:solidFill>
+                <a:latin typeface="맑은 고딕" panose="020B0503020000020004" pitchFamily="50" charset="-127"/>
+              </a:rPr>
+              <a:t>4</a:t>
+            </a:r>
+            <a:r>
+              <a:rPr lang="ko-KR" altLang="en-US" sz="1000">
+                <a:solidFill>
+                  <a:srgbClr val="000000"/>
+                </a:solidFill>
+                <a:latin typeface="맑은 고딕" panose="020B0503020000020004" pitchFamily="50" charset="-127"/>
+              </a:rPr>
+              <a:t>일 </a:t>
+            </a:r>
+            <a:r>
+              <a:rPr lang="en-US" altLang="ko-KR" sz="1000">
+                <a:solidFill>
+                  <a:srgbClr val="000000"/>
+                </a:solidFill>
+                <a:latin typeface="맑은 고딕" panose="020B0503020000020004" pitchFamily="50" charset="-127"/>
+              </a:rPr>
+              <a:t>SPQA </a:t>
+            </a:r>
+            <a:r>
+              <a:rPr lang="ko-KR" altLang="en-US" sz="1000">
+                <a:solidFill>
+                  <a:srgbClr val="000000"/>
+                </a:solidFill>
+                <a:latin typeface="맑은 고딕" panose="020B0503020000020004" pitchFamily="50" charset="-127"/>
+              </a:rPr>
+              <a:t>프로젝트 담당자 확정</a:t>
+            </a:r>
+          </a:p>
+          <a:p>
+            <a:pPr latinLnBrk="0"/>
+            <a:endParaRPr lang="en-US" altLang="ko-KR" sz="1000" smtClean="0">
+              <a:solidFill>
+                <a:srgbClr val="000000"/>
+              </a:solidFill>
+              <a:latin typeface="맑은 고딕" panose="020B0503020000020004" pitchFamily="50" charset="-127"/>
+            </a:endParaRPr>
+          </a:p>
+          <a:p>
+            <a:pPr latinLnBrk="0"/>
+            <a:r>
+              <a:rPr lang="en-US" altLang="ko-KR" sz="1000">
+                <a:solidFill>
+                  <a:srgbClr val="000000"/>
+                </a:solidFill>
+                <a:latin typeface="맑은 고딕" panose="020B0503020000020004" pitchFamily="50" charset="-127"/>
+              </a:rPr>
+              <a:t> </a:t>
+            </a:r>
+            <a:r>
+              <a:rPr lang="en-US" altLang="ko-KR" sz="1000" smtClean="0">
+                <a:solidFill>
+                  <a:srgbClr val="000000"/>
+                </a:solidFill>
+                <a:latin typeface="맑은 고딕" panose="020B0503020000020004" pitchFamily="50" charset="-127"/>
+              </a:rPr>
+              <a:t>  - </a:t>
+            </a:r>
+            <a:r>
+              <a:rPr lang="ko-KR" altLang="en-US" sz="1000" smtClean="0">
+                <a:solidFill>
+                  <a:srgbClr val="000000"/>
+                </a:solidFill>
+                <a:latin typeface="맑은 고딕" panose="020B0503020000020004" pitchFamily="50" charset="-127"/>
+              </a:rPr>
+              <a:t>추가 </a:t>
+            </a:r>
+            <a:r>
+              <a:rPr lang="ko-KR" altLang="en-US" sz="1000">
+                <a:solidFill>
+                  <a:srgbClr val="000000"/>
+                </a:solidFill>
+                <a:latin typeface="맑은 고딕" panose="020B0503020000020004" pitchFamily="50" charset="-127"/>
+              </a:rPr>
+              <a:t>확정 </a:t>
+            </a:r>
+            <a:r>
+              <a:rPr lang="en-US" altLang="ko-KR" sz="1000">
+                <a:solidFill>
+                  <a:srgbClr val="000000"/>
+                </a:solidFill>
+                <a:latin typeface="맑은 고딕" panose="020B0503020000020004" pitchFamily="50" charset="-127"/>
+              </a:rPr>
+              <a:t>: SUP.8(CM):</a:t>
+            </a:r>
+            <a:r>
+              <a:rPr lang="ko-KR" altLang="en-US" sz="1000">
+                <a:solidFill>
+                  <a:srgbClr val="000000"/>
+                </a:solidFill>
+                <a:latin typeface="맑은 고딕" panose="020B0503020000020004" pitchFamily="50" charset="-127"/>
+              </a:rPr>
+              <a:t>이대운 선임 겸직</a:t>
+            </a:r>
+            <a:r>
+              <a:rPr lang="en-US" altLang="ko-KR" sz="1000">
+                <a:solidFill>
+                  <a:srgbClr val="000000"/>
+                </a:solidFill>
+                <a:latin typeface="맑은 고딕" panose="020B0503020000020004" pitchFamily="50" charset="-127"/>
+              </a:rPr>
+              <a:t>, SUP9(PRM), SUP.10(CRM): </a:t>
+            </a:r>
+            <a:r>
+              <a:rPr lang="ko-KR" altLang="en-US" sz="1000">
+                <a:solidFill>
+                  <a:srgbClr val="000000"/>
+                </a:solidFill>
+                <a:latin typeface="맑은 고딕" panose="020B0503020000020004" pitchFamily="50" charset="-127"/>
+              </a:rPr>
+              <a:t>신규입사자 </a:t>
+            </a:r>
+            <a:r>
+              <a:rPr lang="ko-KR" altLang="en-US" sz="1000">
+                <a:solidFill>
+                  <a:srgbClr val="000000"/>
+                </a:solidFill>
+                <a:latin typeface="맑은 고딕" panose="020B0503020000020004" pitchFamily="50" charset="-127"/>
+              </a:rPr>
+              <a:t>조성연 </a:t>
+            </a:r>
+            <a:r>
+              <a:rPr lang="ko-KR" altLang="en-US" sz="1000" smtClean="0">
+                <a:solidFill>
+                  <a:srgbClr val="000000"/>
+                </a:solidFill>
+                <a:latin typeface="맑은 고딕" panose="020B0503020000020004" pitchFamily="50" charset="-127"/>
+              </a:rPr>
+              <a:t>전임</a:t>
+            </a:r>
+            <a:endParaRPr lang="en-US" altLang="ko-KR" sz="1000" smtClean="0">
+              <a:solidFill>
+                <a:srgbClr val="000000"/>
+              </a:solidFill>
+              <a:latin typeface="맑은 고딕" panose="020B0503020000020004" pitchFamily="50" charset="-127"/>
+            </a:endParaRPr>
+          </a:p>
+          <a:p>
+            <a:pPr latinLnBrk="0"/>
+            <a:endParaRPr lang="ko-KR" altLang="en-US" sz="1000">
+              <a:solidFill>
+                <a:srgbClr val="000000"/>
+              </a:solidFill>
+              <a:latin typeface="맑은 고딕" panose="020B0503020000020004" pitchFamily="50" charset="-127"/>
+            </a:endParaRPr>
+          </a:p>
+          <a:p>
+            <a:pPr latinLnBrk="0"/>
+            <a:r>
+              <a:rPr lang="en-US" altLang="ko-KR" sz="1000">
+                <a:solidFill>
+                  <a:srgbClr val="000000"/>
+                </a:solidFill>
+                <a:latin typeface="맑은 고딕" panose="020B0503020000020004" pitchFamily="50" charset="-127"/>
+              </a:rPr>
+              <a:t>25</a:t>
+            </a:r>
+            <a:r>
+              <a:rPr lang="ko-KR" altLang="en-US" sz="1000">
+                <a:solidFill>
+                  <a:srgbClr val="000000"/>
+                </a:solidFill>
+                <a:latin typeface="맑은 고딕" panose="020B0503020000020004" pitchFamily="50" charset="-127"/>
+              </a:rPr>
+              <a:t>년 </a:t>
+            </a:r>
+            <a:r>
+              <a:rPr lang="en-US" altLang="ko-KR" sz="1000">
+                <a:solidFill>
+                  <a:srgbClr val="000000"/>
+                </a:solidFill>
+                <a:latin typeface="맑은 고딕" panose="020B0503020000020004" pitchFamily="50" charset="-127"/>
+              </a:rPr>
+              <a:t>9</a:t>
+            </a:r>
+            <a:r>
+              <a:rPr lang="ko-KR" altLang="en-US" sz="1000">
+                <a:solidFill>
+                  <a:srgbClr val="000000"/>
+                </a:solidFill>
+                <a:latin typeface="맑은 고딕" panose="020B0503020000020004" pitchFamily="50" charset="-127"/>
+              </a:rPr>
+              <a:t>월 </a:t>
+            </a:r>
+            <a:r>
+              <a:rPr lang="en-US" altLang="ko-KR" sz="1000">
+                <a:solidFill>
+                  <a:srgbClr val="000000"/>
+                </a:solidFill>
+                <a:latin typeface="맑은 고딕" panose="020B0503020000020004" pitchFamily="50" charset="-127"/>
+              </a:rPr>
+              <a:t>16</a:t>
+            </a:r>
+            <a:r>
+              <a:rPr lang="ko-KR" altLang="en-US" sz="1000">
+                <a:solidFill>
+                  <a:srgbClr val="000000"/>
+                </a:solidFill>
+                <a:latin typeface="맑은 고딕" panose="020B0503020000020004" pitchFamily="50" charset="-127"/>
+              </a:rPr>
+              <a:t>일 </a:t>
+            </a:r>
+            <a:r>
+              <a:rPr lang="en-US" altLang="ko-KR" sz="1000">
+                <a:solidFill>
+                  <a:srgbClr val="000000"/>
+                </a:solidFill>
+                <a:latin typeface="맑은 고딕" panose="020B0503020000020004" pitchFamily="50" charset="-127"/>
+              </a:rPr>
+              <a:t>~ 19</a:t>
+            </a:r>
+            <a:r>
+              <a:rPr lang="ko-KR" altLang="en-US" sz="1000">
+                <a:solidFill>
+                  <a:srgbClr val="000000"/>
+                </a:solidFill>
+                <a:latin typeface="맑은 고딕" panose="020B0503020000020004" pitchFamily="50" charset="-127"/>
+              </a:rPr>
+              <a:t>일 </a:t>
+            </a:r>
+            <a:r>
+              <a:rPr lang="en-US" altLang="ko-KR" sz="1000">
+                <a:solidFill>
+                  <a:srgbClr val="000000"/>
+                </a:solidFill>
+                <a:latin typeface="맑은 고딕" panose="020B0503020000020004" pitchFamily="50" charset="-127"/>
+              </a:rPr>
+              <a:t>SPQA </a:t>
+            </a:r>
+            <a:r>
+              <a:rPr lang="ko-KR" altLang="en-US" sz="1000">
+                <a:solidFill>
+                  <a:srgbClr val="000000"/>
+                </a:solidFill>
+                <a:latin typeface="맑은 고딕" panose="020B0503020000020004" pitchFamily="50" charset="-127"/>
+              </a:rPr>
+              <a:t>평가 </a:t>
+            </a:r>
+            <a:r>
+              <a:rPr lang="ko-KR" altLang="en-US" sz="1000" smtClean="0">
+                <a:solidFill>
+                  <a:srgbClr val="000000"/>
+                </a:solidFill>
+                <a:latin typeface="맑은 고딕" panose="020B0503020000020004" pitchFamily="50" charset="-127"/>
+              </a:rPr>
+              <a:t>진행</a:t>
+            </a:r>
+            <a:endParaRPr lang="en-US" altLang="ko-KR" sz="1000" smtClean="0">
+              <a:solidFill>
+                <a:srgbClr val="000000"/>
+              </a:solidFill>
+              <a:latin typeface="맑은 고딕" panose="020B0503020000020004" pitchFamily="50" charset="-127"/>
+            </a:endParaRPr>
+          </a:p>
+          <a:p>
+            <a:pPr latinLnBrk="0"/>
+            <a:r>
+              <a:rPr lang="ko-KR" altLang="en-US" sz="1000">
+                <a:solidFill>
+                  <a:srgbClr val="000000"/>
+                </a:solidFill>
+                <a:latin typeface="맑은 고딕" panose="020B0503020000020004" pitchFamily="50" charset="-127"/>
+              </a:rPr>
+              <a:t/>
+            </a:r>
+            <a:br>
+              <a:rPr lang="ko-KR" altLang="en-US" sz="1000">
+                <a:solidFill>
+                  <a:srgbClr val="000000"/>
+                </a:solidFill>
+                <a:latin typeface="맑은 고딕" panose="020B0503020000020004" pitchFamily="50" charset="-127"/>
+              </a:rPr>
+            </a:br>
+            <a:r>
+              <a:rPr lang="en-US" altLang="ko-KR" sz="1000">
+                <a:solidFill>
+                  <a:srgbClr val="000000"/>
+                </a:solidFill>
+                <a:latin typeface="맑은 고딕" panose="020B0503020000020004" pitchFamily="50" charset="-127"/>
+              </a:rPr>
+              <a:t>25</a:t>
+            </a:r>
+            <a:r>
+              <a:rPr lang="ko-KR" altLang="en-US" sz="1000">
+                <a:solidFill>
+                  <a:srgbClr val="000000"/>
+                </a:solidFill>
+                <a:latin typeface="맑은 고딕" panose="020B0503020000020004" pitchFamily="50" charset="-127"/>
+              </a:rPr>
+              <a:t>년 </a:t>
+            </a:r>
+            <a:r>
+              <a:rPr lang="en-US" altLang="ko-KR" sz="1000">
+                <a:solidFill>
+                  <a:srgbClr val="000000"/>
+                </a:solidFill>
+                <a:latin typeface="맑은 고딕" panose="020B0503020000020004" pitchFamily="50" charset="-127"/>
+              </a:rPr>
+              <a:t>9</a:t>
+            </a:r>
+            <a:r>
+              <a:rPr lang="ko-KR" altLang="en-US" sz="1000">
+                <a:solidFill>
+                  <a:srgbClr val="000000"/>
+                </a:solidFill>
+                <a:latin typeface="맑은 고딕" panose="020B0503020000020004" pitchFamily="50" charset="-127"/>
+              </a:rPr>
+              <a:t>월 </a:t>
+            </a:r>
+            <a:r>
+              <a:rPr lang="en-US" altLang="ko-KR" sz="1000">
+                <a:solidFill>
+                  <a:srgbClr val="000000"/>
+                </a:solidFill>
+                <a:latin typeface="맑은 고딕" panose="020B0503020000020004" pitchFamily="50" charset="-127"/>
+              </a:rPr>
+              <a:t>22</a:t>
+            </a:r>
+            <a:r>
+              <a:rPr lang="ko-KR" altLang="en-US" sz="1000">
+                <a:solidFill>
+                  <a:srgbClr val="000000"/>
+                </a:solidFill>
+                <a:latin typeface="맑은 고딕" panose="020B0503020000020004" pitchFamily="50" charset="-127"/>
+              </a:rPr>
+              <a:t>일 </a:t>
+            </a:r>
+            <a:r>
+              <a:rPr lang="en-US" altLang="ko-KR" sz="1000">
+                <a:solidFill>
+                  <a:srgbClr val="000000"/>
+                </a:solidFill>
+                <a:latin typeface="맑은 고딕" panose="020B0503020000020004" pitchFamily="50" charset="-127"/>
+              </a:rPr>
+              <a:t>: </a:t>
+            </a:r>
+            <a:r>
+              <a:rPr lang="ko-KR" altLang="en-US" sz="1000">
+                <a:solidFill>
+                  <a:srgbClr val="000000"/>
+                </a:solidFill>
+                <a:latin typeface="맑은 고딕" panose="020B0503020000020004" pitchFamily="50" charset="-127"/>
+              </a:rPr>
+              <a:t>기아자동차 김소희 매니저에게 입찰 자격 제한 통보 내용 수신 </a:t>
+            </a:r>
+            <a:r>
+              <a:rPr lang="en-US" altLang="ko-KR" sz="1000">
+                <a:solidFill>
+                  <a:srgbClr val="000000"/>
+                </a:solidFill>
+                <a:latin typeface="맑은 고딕" panose="020B0503020000020004" pitchFamily="50" charset="-127"/>
+              </a:rPr>
+              <a:t>-&gt; </a:t>
+            </a:r>
+            <a:r>
+              <a:rPr lang="ko-KR" altLang="en-US" sz="1000">
+                <a:solidFill>
+                  <a:srgbClr val="000000"/>
+                </a:solidFill>
+                <a:latin typeface="맑은 고딕" panose="020B0503020000020004" pitchFamily="50" charset="-127"/>
+              </a:rPr>
+              <a:t>이대운</a:t>
+            </a:r>
+            <a:r>
+              <a:rPr lang="en-US" altLang="ko-KR" sz="1000">
+                <a:solidFill>
+                  <a:srgbClr val="000000"/>
+                </a:solidFill>
+                <a:latin typeface="맑은 고딕" panose="020B0503020000020004" pitchFamily="50" charset="-127"/>
+              </a:rPr>
+              <a:t>/</a:t>
+            </a:r>
+            <a:r>
+              <a:rPr lang="ko-KR" altLang="en-US" sz="1000" smtClean="0">
+                <a:solidFill>
+                  <a:srgbClr val="000000"/>
+                </a:solidFill>
+                <a:latin typeface="맑은 고딕" panose="020B0503020000020004" pitchFamily="50" charset="-127"/>
+              </a:rPr>
+              <a:t>선임</a:t>
+            </a:r>
+            <a:endParaRPr lang="en-US" altLang="ko-KR" sz="1000" smtClean="0">
+              <a:solidFill>
+                <a:srgbClr val="000000"/>
+              </a:solidFill>
+              <a:latin typeface="맑은 고딕" panose="020B0503020000020004" pitchFamily="50" charset="-127"/>
+            </a:endParaRPr>
+          </a:p>
+          <a:p>
+            <a:pPr latinLnBrk="0"/>
+            <a:endParaRPr lang="ko-KR" altLang="en-US" sz="1000">
+              <a:solidFill>
+                <a:srgbClr val="000000"/>
+              </a:solidFill>
+              <a:latin typeface="맑은 고딕" panose="020B0503020000020004" pitchFamily="50" charset="-127"/>
             </a:endParaRPr>
           </a:p>
         </p:txBody>
